--- a/dist/초5/사회·역사/역사와생활/초5_사회·역사_역사와생활_06_광복과6·25전쟁.pptx
+++ b/dist/초5/사회·역사/역사와생활/초5_사회·역사_역사와생활_06_광복과6·25전쟁.pptx
@@ -121,13 +121,13 @@
   <p:extLst>
     <p:ext uri="{521415D9-36F7-43E2-AB2F-B90AF26B5E84}">
       <p14:sectionLst xmlns:p14="http://schemas.microsoft.com/office/powerpoint/2010/main">
-        <p14:section name="도입" id="{d637548a-eece-5b48-8bc1-bf39055a3e7f}">
+        <p14:section name="도입" id="{8704b1a4-89e2-e489-65c4-bb8afd524fde}">
           <p14:sldIdLst>
             <p14:sldId id="256"/>
             <p14:sldId id="257"/>
           </p14:sldIdLst>
         </p14:section>
-        <p14:section name="개념" id="{a04bb29c-9965-7b94-8a0d-aebaabf83aa3}">
+        <p14:section name="개념" id="{f02c3561-6687-bf33-6661-f03fb29c221c}">
           <p14:sldIdLst>
             <p14:sldId id="258"/>
             <p14:sldId id="259"/>
@@ -136,7 +136,7 @@
             <p14:sldId id="264"/>
           </p14:sldIdLst>
         </p14:section>
-        <p14:section name="연습" id="{19c060eb-64e4-4170-e0bd-3a2d4d9122fd}">
+        <p14:section name="연습" id="{fc84455a-642a-bf46-30fb-a29948f11e7e}">
           <p14:sldIdLst>
             <p14:sldId id="260"/>
             <p14:sldId id="261"/>
@@ -144,24 +144,24 @@
             <p14:sldId id="266"/>
           </p14:sldIdLst>
         </p14:section>
-        <p14:section name="개념" id="{080a2743-3181-4dd7-378b-b966347ca413}">
+        <p14:section name="개념" id="{139973ac-dedc-7a26-1fcc-8e90f592ce84}">
           <p14:sldIdLst/>
         </p14:section>
-        <p14:section name="연습" id="{b99b03de-584b-94e8-7d40-a5242bbfe4e2}">
+        <p14:section name="연습" id="{955ce4b1-721f-9cbd-0eae-394b0c0e7977}">
           <p14:sldIdLst/>
         </p14:section>
-        <p14:section name="확인" id="{7ee7a9a5-ec1a-8006-2168-af849a3df888}">
+        <p14:section name="확인" id="{4e13f5e0-2623-fa71-eec9-dc549db7e123}">
           <p14:sldIdLst>
             <p14:sldId id="267"/>
             <p14:sldId id="268"/>
           </p14:sldIdLst>
         </p14:section>
-        <p14:section name="정리" id="{a6492756-0a86-e4d2-14d7-442c7867d91d}">
+        <p14:section name="정리" id="{36e95eee-0f65-f602-c83d-1044392b63a7}">
           <p14:sldIdLst>
             <p14:sldId id="269"/>
           </p14:sldIdLst>
         </p14:section>
-        <p14:section name="보충" id="{5f03c0d5-964c-37ce-6203-d22f6d24fb0c}">
+        <p14:section name="보충" id="{714e836f-fb06-f547-64ee-79a283440cc6}">
           <p14:sldIdLst>
             <p14:sldId id="270"/>
           </p14:sldIdLst>
